--- a/hamzat-wasl/Hamzat-al-Wasl.pptx
+++ b/hamzat-wasl/Hamzat-al-Wasl.pptx
@@ -4,6 +4,9 @@
   <p:sldMasterIdLst>
     <p:sldMasterId id="2147483648" r:id="rId1"/>
   </p:sldMasterIdLst>
+  <p:notesMasterIdLst>
+    <p:notesMasterId r:id="rId37"/>
+  </p:notesMasterIdLst>
   <p:sldIdLst>
     <p:sldId id="256" r:id="rId2"/>
     <p:sldId id="257" r:id="rId3"/>
@@ -41,9 +44,6 @@
     <p:sldId id="289" r:id="rId35"/>
     <p:sldId id="290" r:id="rId36"/>
   </p:sldIdLst>
-  <p:notesMasterIdLst>
-    <p:notesMasterId r:id="rId37"/>
-  </p:notesMasterIdLst>
   <p:sldSz cx="9144000" cy="5143500"/>
   <p:notesSz cx="5143500" cy="9144000"/>
   <p:defaultTextStyle>
@@ -4971,9 +4971,6 @@
               </a:rPr>
               <a:t>ٱ</a:t>
             </a:r>
-            <a:pPr algn="ctr" indent="0" marL="0">
-              <a:buNone/>
-            </a:pPr>
             <a:r>
               <a:rPr lang="ar-SA" altLang="en-US" sz="4000" dirty="0">
                 <a:solidFill>
@@ -5049,9 +5046,6 @@
               </a:rPr>
               <a:t>اِ</a:t>
             </a:r>
-            <a:pPr algn="ctr" indent="0" marL="0">
-              <a:buNone/>
-            </a:pPr>
             <a:r>
               <a:rPr lang="ar-SA" altLang="en-US" sz="3200" dirty="0">
                 <a:solidFill>
@@ -6176,9 +6170,6 @@
               </a:rPr>
               <a:t>اُ</a:t>
             </a:r>
-            <a:pPr algn="ctr" indent="0" marL="0">
-              <a:buNone/>
-            </a:pPr>
             <a:r>
               <a:rPr lang="ar-SA" altLang="en-US" sz="2900" dirty="0">
                 <a:solidFill>
@@ -7713,9 +7704,6 @@
               </a:rPr>
               <a:t>اِ</a:t>
             </a:r>
-            <a:pPr algn="ctr" indent="0" marL="0">
-              <a:buNone/>
-            </a:pPr>
             <a:r>
               <a:rPr lang="ar-SA" altLang="en-US" sz="3800" dirty="0">
                 <a:solidFill>
@@ -9210,9 +9198,6 @@
               </a:rPr>
               <a:t>اِ</a:t>
             </a:r>
-            <a:pPr algn="ctr" indent="0" marL="0">
-              <a:buNone/>
-            </a:pPr>
             <a:r>
               <a:rPr lang="ar-SA" altLang="en-US" sz="3400" dirty="0">
                 <a:solidFill>
@@ -10615,9 +10600,6 @@
               </a:rPr>
               <a:t>ٱ</a:t>
             </a:r>
-            <a:pPr algn="ctr" indent="0" marL="0">
-              <a:buNone/>
-            </a:pPr>
             <a:r>
               <a:rPr lang="ar-SA" altLang="en-US" sz="5000" dirty="0">
                 <a:solidFill>
@@ -10693,9 +10675,6 @@
               </a:rPr>
               <a:t>اُ</a:t>
             </a:r>
-            <a:pPr algn="ctr" indent="0" marL="0">
-              <a:buNone/>
-            </a:pPr>
             <a:r>
               <a:rPr lang="ar-SA" altLang="en-US" sz="3300" dirty="0">
                 <a:solidFill>
@@ -11640,9 +11619,6 @@
               </a:rPr>
               <a:t>ٱ</a:t>
             </a:r>
-            <a:pPr algn="ctr" indent="0" marL="0">
-              <a:buNone/>
-            </a:pPr>
             <a:r>
               <a:rPr lang="ar-SA" altLang="en-US" sz="4600" dirty="0">
                 <a:solidFill>
@@ -11718,9 +11694,6 @@
               </a:rPr>
               <a:t>اُ</a:t>
             </a:r>
-            <a:pPr algn="ctr" indent="0" marL="0">
-              <a:buNone/>
-            </a:pPr>
             <a:r>
               <a:rPr lang="ar-SA" altLang="en-US" sz="3000" dirty="0">
                 <a:solidFill>
@@ -12538,9 +12511,6 @@
               </a:rPr>
               <a:t>ٱ</a:t>
             </a:r>
-            <a:pPr algn="ctr" indent="0" marL="0">
-              <a:buNone/>
-            </a:pPr>
             <a:r>
               <a:rPr lang="ar-SA" altLang="en-US" sz="4100" dirty="0">
                 <a:solidFill>
@@ -12616,9 +12586,6 @@
               </a:rPr>
               <a:t>اِ</a:t>
             </a:r>
-            <a:pPr algn="ctr" indent="0" marL="0">
-              <a:buNone/>
-            </a:pPr>
             <a:r>
               <a:rPr lang="ar-SA" altLang="en-US" sz="2800" dirty="0">
                 <a:solidFill>
@@ -13461,9 +13428,6 @@
               </a:rPr>
               <a:t>ٱ</a:t>
             </a:r>
-            <a:pPr algn="ctr" indent="0" marL="0">
-              <a:buNone/>
-            </a:pPr>
             <a:r>
               <a:rPr lang="ar-SA" altLang="en-US" sz="5100" dirty="0">
                 <a:solidFill>
@@ -13539,9 +13503,6 @@
               </a:rPr>
               <a:t>اِ</a:t>
             </a:r>
-            <a:pPr algn="ctr" indent="0" marL="0">
-              <a:buNone/>
-            </a:pPr>
             <a:r>
               <a:rPr lang="ar-SA" altLang="en-US" sz="3400" dirty="0">
                 <a:solidFill>
@@ -14565,9 +14526,6 @@
               </a:rPr>
               <a:t>بِسۡمِ </a:t>
             </a:r>
-            <a:pPr algn="ctr" indent="0" marL="0">
-              <a:buNone/>
-            </a:pPr>
             <a:r>
               <a:rPr lang="ar-SA" altLang="en-US" sz="4100" dirty="0">
                 <a:solidFill>
@@ -14579,9 +14537,6 @@
               </a:rPr>
               <a:t>ٱ</a:t>
             </a:r>
-            <a:pPr algn="ctr" indent="0" marL="0">
-              <a:buNone/>
-            </a:pPr>
             <a:r>
               <a:rPr lang="ar-SA" altLang="en-US" sz="4100" dirty="0">
                 <a:solidFill>
@@ -15250,9 +15205,6 @@
               </a:rPr>
               <a:t>بِسۡمِ </a:t>
             </a:r>
-            <a:pPr algn="ctr" indent="0" marL="0">
-              <a:buNone/>
-            </a:pPr>
             <a:r>
               <a:rPr lang="ar-SA" altLang="en-US" sz="4100" dirty="0">
                 <a:solidFill>
@@ -15264,9 +15216,6 @@
               </a:rPr>
               <a:t>ٱ</a:t>
             </a:r>
-            <a:pPr algn="ctr" indent="0" marL="0">
-              <a:buNone/>
-            </a:pPr>
             <a:r>
               <a:rPr lang="ar-SA" altLang="en-US" sz="4100" dirty="0">
                 <a:solidFill>
@@ -15342,9 +15291,6 @@
               </a:rPr>
               <a:t>بِسۡمِ </a:t>
             </a:r>
-            <a:pPr algn="ctr" indent="0" marL="0">
-              <a:buNone/>
-            </a:pPr>
             <a:r>
               <a:rPr lang="ar-SA" altLang="en-US" sz="2700" dirty="0">
                 <a:solidFill>
@@ -15356,9 +15302,6 @@
               </a:rPr>
               <a:t>ٱ</a:t>
             </a:r>
-            <a:pPr algn="ctr" indent="0" marL="0">
-              <a:buNone/>
-            </a:pPr>
             <a:r>
               <a:rPr lang="ar-SA" altLang="en-US" sz="2700" dirty="0">
                 <a:solidFill>
@@ -16532,9 +16475,6 @@
               </a:rPr>
               <a:t>أ  إ  </a:t>
             </a:r>
-            <a:pPr algn="ctr" indent="0" marL="0">
-              <a:buNone/>
-            </a:pPr>
             <a:r>
               <a:rPr lang="ar-SA" altLang="en-US" sz="8300" dirty="0">
                 <a:solidFill>
@@ -17393,9 +17333,6 @@
               </a:rPr>
               <a:t>رَبِّ </a:t>
             </a:r>
-            <a:pPr algn="ctr" indent="0" marL="0">
-              <a:buNone/>
-            </a:pPr>
             <a:r>
               <a:rPr lang="ar-SA" altLang="en-US" sz="5000" dirty="0">
                 <a:solidFill>
@@ -17407,9 +17344,6 @@
               </a:rPr>
               <a:t>ٱ</a:t>
             </a:r>
-            <a:pPr algn="ctr" indent="0" marL="0">
-              <a:buNone/>
-            </a:pPr>
             <a:r>
               <a:rPr lang="ar-SA" altLang="en-US" sz="5000" dirty="0">
                 <a:solidFill>
@@ -17485,9 +17419,6 @@
               </a:rPr>
               <a:t>رَبِّ </a:t>
             </a:r>
-            <a:pPr algn="ctr" indent="0" marL="0">
-              <a:buNone/>
-            </a:pPr>
             <a:r>
               <a:rPr lang="ar-SA" altLang="en-US" sz="3300" dirty="0">
                 <a:solidFill>
@@ -17499,9 +17430,6 @@
               </a:rPr>
               <a:t>ٱ</a:t>
             </a:r>
-            <a:pPr algn="ctr" indent="0" marL="0">
-              <a:buNone/>
-            </a:pPr>
             <a:r>
               <a:rPr lang="ar-SA" altLang="en-US" sz="3300" dirty="0">
                 <a:solidFill>
@@ -18446,9 +18374,6 @@
               </a:rPr>
               <a:t>وَ</a:t>
             </a:r>
-            <a:pPr algn="ctr" indent="0" marL="0">
-              <a:buNone/>
-            </a:pPr>
             <a:r>
               <a:rPr lang="ar-SA" altLang="en-US" sz="5000" dirty="0">
                 <a:solidFill>
@@ -18460,9 +18385,6 @@
               </a:rPr>
               <a:t>ٱ</a:t>
             </a:r>
-            <a:pPr algn="ctr" indent="0" marL="0">
-              <a:buNone/>
-            </a:pPr>
             <a:r>
               <a:rPr lang="ar-SA" altLang="en-US" sz="5000" dirty="0">
                 <a:solidFill>
@@ -18538,9 +18460,6 @@
               </a:rPr>
               <a:t>وَ</a:t>
             </a:r>
-            <a:pPr algn="ctr" indent="0" marL="0">
-              <a:buNone/>
-            </a:pPr>
             <a:r>
               <a:rPr lang="ar-SA" altLang="en-US" sz="3300" dirty="0">
                 <a:solidFill>
@@ -18552,9 +18471,6 @@
               </a:rPr>
               <a:t>ٱ</a:t>
             </a:r>
-            <a:pPr algn="ctr" indent="0" marL="0">
-              <a:buNone/>
-            </a:pPr>
             <a:r>
               <a:rPr lang="ar-SA" altLang="en-US" sz="3300" dirty="0">
                 <a:solidFill>
@@ -19372,9 +19288,6 @@
               </a:rPr>
               <a:t>فِي </a:t>
             </a:r>
-            <a:pPr algn="ctr" indent="0" marL="0">
-              <a:buNone/>
-            </a:pPr>
             <a:r>
               <a:rPr lang="ar-SA" altLang="en-US" sz="4100" dirty="0">
                 <a:solidFill>
@@ -19386,9 +19299,6 @@
               </a:rPr>
               <a:t>ٱ</a:t>
             </a:r>
-            <a:pPr algn="ctr" indent="0" marL="0">
-              <a:buNone/>
-            </a:pPr>
             <a:r>
               <a:rPr lang="ar-SA" altLang="en-US" sz="4100" dirty="0">
                 <a:solidFill>
@@ -19464,9 +19374,6 @@
               </a:rPr>
               <a:t>فِ</a:t>
             </a:r>
-            <a:pPr algn="ctr" indent="0" marL="0">
-              <a:buNone/>
-            </a:pPr>
             <a:r>
               <a:rPr lang="ar-SA" altLang="en-US" sz="2700" dirty="0">
                 <a:solidFill>
@@ -19478,9 +19385,6 @@
               </a:rPr>
               <a:t>ي</a:t>
             </a:r>
-            <a:pPr algn="ctr" indent="0" marL="0">
-              <a:buNone/>
-            </a:pPr>
             <a:r>
               <a:rPr lang="ar-SA" altLang="en-US" sz="2700" dirty="0">
                 <a:solidFill>
@@ -19492,9 +19396,6 @@
               </a:rPr>
               <a:t> </a:t>
             </a:r>
-            <a:pPr algn="ctr" indent="0" marL="0">
-              <a:buNone/>
-            </a:pPr>
             <a:r>
               <a:rPr lang="ar-SA" altLang="en-US" sz="2700" dirty="0">
                 <a:solidFill>
@@ -19506,9 +19407,6 @@
               </a:rPr>
               <a:t>ٱ</a:t>
             </a:r>
-            <a:pPr algn="ctr" indent="0" marL="0">
-              <a:buNone/>
-            </a:pPr>
             <a:r>
               <a:rPr lang="ar-SA" altLang="en-US" sz="2700" dirty="0">
                 <a:solidFill>
@@ -20351,9 +20249,6 @@
               </a:rPr>
               <a:t>إِذَا </a:t>
             </a:r>
-            <a:pPr algn="ctr" indent="0" marL="0">
-              <a:buNone/>
-            </a:pPr>
             <a:r>
               <a:rPr lang="ar-SA" altLang="en-US" sz="4800" dirty="0">
                 <a:solidFill>
@@ -20365,9 +20260,6 @@
               </a:rPr>
               <a:t>ٱ</a:t>
             </a:r>
-            <a:pPr algn="ctr" indent="0" marL="0">
-              <a:buNone/>
-            </a:pPr>
             <a:r>
               <a:rPr lang="ar-SA" altLang="en-US" sz="4800" dirty="0">
                 <a:solidFill>
@@ -20443,9 +20335,6 @@
               </a:rPr>
               <a:t>إِذَ</a:t>
             </a:r>
-            <a:pPr algn="ctr" indent="0" marL="0">
-              <a:buNone/>
-            </a:pPr>
             <a:r>
               <a:rPr lang="ar-SA" altLang="en-US" sz="3200" dirty="0">
                 <a:solidFill>
@@ -20457,9 +20346,6 @@
               </a:rPr>
               <a:t>ا</a:t>
             </a:r>
-            <a:pPr algn="ctr" indent="0" marL="0">
-              <a:buNone/>
-            </a:pPr>
             <a:r>
               <a:rPr lang="ar-SA" altLang="en-US" sz="3200" dirty="0">
                 <a:solidFill>
@@ -20471,9 +20357,6 @@
               </a:rPr>
               <a:t> </a:t>
             </a:r>
-            <a:pPr algn="ctr" indent="0" marL="0">
-              <a:buNone/>
-            </a:pPr>
             <a:r>
               <a:rPr lang="ar-SA" altLang="en-US" sz="3200" dirty="0">
                 <a:solidFill>
@@ -20485,9 +20368,6 @@
               </a:rPr>
               <a:t>ٱ</a:t>
             </a:r>
-            <a:pPr algn="ctr" indent="0" marL="0">
-              <a:buNone/>
-            </a:pPr>
             <a:r>
               <a:rPr lang="ar-SA" altLang="en-US" sz="3200" dirty="0">
                 <a:solidFill>
@@ -21355,9 +21235,6 @@
               </a:rPr>
               <a:t>وَ</a:t>
             </a:r>
-            <a:pPr algn="ctr" indent="0" marL="0">
-              <a:buNone/>
-            </a:pPr>
             <a:r>
               <a:rPr lang="ar-SA" altLang="en-US" sz="4600" dirty="0">
                 <a:solidFill>
@@ -21369,9 +21246,6 @@
               </a:rPr>
               <a:t>ٱ</a:t>
             </a:r>
-            <a:pPr algn="ctr" indent="0" marL="0">
-              <a:buNone/>
-            </a:pPr>
             <a:r>
               <a:rPr lang="ar-SA" altLang="en-US" sz="4600" dirty="0">
                 <a:solidFill>
@@ -21383,9 +21257,6 @@
               </a:rPr>
               <a:t>تَّقُوا۟ </a:t>
             </a:r>
-            <a:pPr algn="ctr" indent="0" marL="0">
-              <a:buNone/>
-            </a:pPr>
             <a:r>
               <a:rPr lang="ar-SA" altLang="en-US" sz="4600" dirty="0">
                 <a:solidFill>
@@ -21397,9 +21268,6 @@
               </a:rPr>
               <a:t>ٱ</a:t>
             </a:r>
-            <a:pPr algn="ctr" indent="0" marL="0">
-              <a:buNone/>
-            </a:pPr>
             <a:r>
               <a:rPr lang="ar-SA" altLang="en-US" sz="4600" dirty="0">
                 <a:solidFill>
@@ -21475,9 +21343,6 @@
               </a:rPr>
               <a:t>وَ</a:t>
             </a:r>
-            <a:pPr algn="ctr" indent="0" marL="0">
-              <a:buNone/>
-            </a:pPr>
             <a:r>
               <a:rPr lang="ar-SA" altLang="en-US" sz="3000" dirty="0">
                 <a:solidFill>
@@ -21489,9 +21354,6 @@
               </a:rPr>
               <a:t>ٱ</a:t>
             </a:r>
-            <a:pPr algn="ctr" indent="0" marL="0">
-              <a:buNone/>
-            </a:pPr>
             <a:r>
               <a:rPr lang="ar-SA" altLang="en-US" sz="3000" dirty="0">
                 <a:solidFill>
@@ -21503,9 +21365,6 @@
               </a:rPr>
               <a:t>تَّقُ</a:t>
             </a:r>
-            <a:pPr algn="ctr" indent="0" marL="0">
-              <a:buNone/>
-            </a:pPr>
             <a:r>
               <a:rPr lang="ar-SA" altLang="en-US" sz="3000" dirty="0">
                 <a:solidFill>
@@ -21517,9 +21376,6 @@
               </a:rPr>
               <a:t>وا۟</a:t>
             </a:r>
-            <a:pPr algn="ctr" indent="0" marL="0">
-              <a:buNone/>
-            </a:pPr>
             <a:r>
               <a:rPr lang="ar-SA" altLang="en-US" sz="3000" dirty="0">
                 <a:solidFill>
@@ -21531,9 +21387,6 @@
               </a:rPr>
               <a:t> </a:t>
             </a:r>
-            <a:pPr algn="ctr" indent="0" marL="0">
-              <a:buNone/>
-            </a:pPr>
             <a:r>
               <a:rPr lang="ar-SA" altLang="en-US" sz="3000" dirty="0">
                 <a:solidFill>
@@ -21545,9 +21398,6 @@
               </a:rPr>
               <a:t>ٱ</a:t>
             </a:r>
-            <a:pPr algn="ctr" indent="0" marL="0">
-              <a:buNone/>
-            </a:pPr>
             <a:r>
               <a:rPr lang="ar-SA" altLang="en-US" sz="3000" dirty="0">
                 <a:solidFill>
@@ -22375,9 +22225,6 @@
               </a:rPr>
               <a:t>ٱ</a:t>
             </a:r>
-            <a:pPr algn="ctr" indent="0" marL="0">
-              <a:buNone/>
-            </a:pPr>
             <a:r>
               <a:rPr lang="ar-SA" altLang="en-US" sz="5000" dirty="0">
                 <a:solidFill>
@@ -22453,9 +22300,6 @@
               </a:rPr>
               <a:t>اَ</a:t>
             </a:r>
-            <a:pPr algn="ctr" indent="0" marL="0">
-              <a:buNone/>
-            </a:pPr>
             <a:r>
               <a:rPr lang="ar-SA" altLang="en-US" sz="3300" dirty="0">
                 <a:solidFill>
@@ -23473,9 +23317,6 @@
               </a:rPr>
               <a:t>ٱ</a:t>
             </a:r>
-            <a:pPr algn="ctr" indent="0" marL="0">
-              <a:buNone/>
-            </a:pPr>
             <a:r>
               <a:rPr lang="ar-SA" altLang="en-US" sz="4900" dirty="0">
                 <a:solidFill>
@@ -23551,9 +23392,6 @@
               </a:rPr>
               <a:t>اَ</a:t>
             </a:r>
-            <a:pPr algn="ctr" indent="0" marL="0">
-              <a:buNone/>
-            </a:pPr>
             <a:r>
               <a:rPr lang="ar-SA" altLang="en-US" sz="3200" dirty="0">
                 <a:solidFill>
@@ -23565,9 +23403,6 @@
               </a:rPr>
               <a:t>ل</a:t>
             </a:r>
-            <a:pPr algn="ctr" indent="0" marL="0">
-              <a:buNone/>
-            </a:pPr>
             <a:r>
               <a:rPr lang="ar-SA" altLang="en-US" sz="3200" dirty="0">
                 <a:solidFill>
@@ -24512,9 +24347,6 @@
               </a:rPr>
               <a:t>قُلِ </a:t>
             </a:r>
-            <a:pPr algn="ctr" indent="0" marL="0">
-              <a:buNone/>
-            </a:pPr>
             <a:r>
               <a:rPr lang="ar-SA" altLang="en-US" sz="4600" dirty="0">
                 <a:solidFill>
@@ -24526,9 +24358,6 @@
               </a:rPr>
               <a:t>ٱ</a:t>
             </a:r>
-            <a:pPr algn="ctr" indent="0" marL="0">
-              <a:buNone/>
-            </a:pPr>
             <a:r>
               <a:rPr lang="ar-SA" altLang="en-US" sz="4600" dirty="0">
                 <a:solidFill>
@@ -24604,9 +24433,6 @@
               </a:rPr>
               <a:t>قُلِ </a:t>
             </a:r>
-            <a:pPr algn="ctr" indent="0" marL="0">
-              <a:buNone/>
-            </a:pPr>
             <a:r>
               <a:rPr lang="ar-SA" altLang="en-US" sz="3000" dirty="0">
                 <a:solidFill>
@@ -24618,9 +24444,6 @@
               </a:rPr>
               <a:t>ٱ</a:t>
             </a:r>
-            <a:pPr algn="ctr" indent="0" marL="0">
-              <a:buNone/>
-            </a:pPr>
             <a:r>
               <a:rPr lang="ar-SA" altLang="en-US" sz="3000" dirty="0">
                 <a:solidFill>
@@ -25438,9 +25261,6 @@
               </a:rPr>
               <a:t>مِنَ </a:t>
             </a:r>
-            <a:pPr algn="ctr" indent="0" marL="0">
-              <a:buNone/>
-            </a:pPr>
             <a:r>
               <a:rPr lang="ar-SA" altLang="en-US" sz="4600" dirty="0">
                 <a:solidFill>
@@ -25452,9 +25272,6 @@
               </a:rPr>
               <a:t>ٱ</a:t>
             </a:r>
-            <a:pPr algn="ctr" indent="0" marL="0">
-              <a:buNone/>
-            </a:pPr>
             <a:r>
               <a:rPr lang="ar-SA" altLang="en-US" sz="4600" dirty="0">
                 <a:solidFill>
@@ -25530,9 +25347,6 @@
               </a:rPr>
               <a:t>مِنَ </a:t>
             </a:r>
-            <a:pPr algn="ctr" indent="0" marL="0">
-              <a:buNone/>
-            </a:pPr>
             <a:r>
               <a:rPr lang="ar-SA" altLang="en-US" sz="3000" dirty="0">
                 <a:solidFill>
@@ -25544,9 +25358,6 @@
               </a:rPr>
               <a:t>ٱ</a:t>
             </a:r>
-            <a:pPr algn="ctr" indent="0" marL="0">
-              <a:buNone/>
-            </a:pPr>
             <a:r>
               <a:rPr lang="ar-SA" altLang="en-US" sz="3000" dirty="0">
                 <a:solidFill>
@@ -26389,9 +26200,6 @@
               </a:rPr>
               <a:t>عَلَيۡهِمُ </a:t>
             </a:r>
-            <a:pPr algn="ctr" indent="0" marL="0">
-              <a:buNone/>
-            </a:pPr>
             <a:r>
               <a:rPr lang="ar-SA" altLang="en-US" sz="4500" dirty="0">
                 <a:solidFill>
@@ -26403,9 +26211,6 @@
               </a:rPr>
               <a:t>ٱ</a:t>
             </a:r>
-            <a:pPr algn="ctr" indent="0" marL="0">
-              <a:buNone/>
-            </a:pPr>
             <a:r>
               <a:rPr lang="ar-SA" altLang="en-US" sz="4500" dirty="0">
                 <a:solidFill>
@@ -26481,9 +26286,6 @@
               </a:rPr>
               <a:t>عَلَيۡهِمُ </a:t>
             </a:r>
-            <a:pPr algn="ctr" indent="0" marL="0">
-              <a:buNone/>
-            </a:pPr>
             <a:r>
               <a:rPr lang="ar-SA" altLang="en-US" sz="2900" dirty="0">
                 <a:solidFill>
@@ -26495,9 +26297,6 @@
               </a:rPr>
               <a:t>ٱ</a:t>
             </a:r>
-            <a:pPr algn="ctr" indent="0" marL="0">
-              <a:buNone/>
-            </a:pPr>
             <a:r>
               <a:rPr lang="ar-SA" altLang="en-US" sz="2900" dirty="0">
                 <a:solidFill>
@@ -28295,9 +28094,6 @@
               </a:rPr>
               <a:t>خَيۡرًا </a:t>
             </a:r>
-            <a:pPr algn="ctr" indent="0" marL="0">
-              <a:buNone/>
-            </a:pPr>
             <a:r>
               <a:rPr lang="ar-SA" altLang="en-US" sz="5000" dirty="0">
                 <a:solidFill>
@@ -28309,9 +28105,6 @@
               </a:rPr>
               <a:t>ٱ</a:t>
             </a:r>
-            <a:pPr algn="ctr" indent="0" marL="0">
-              <a:buNone/>
-            </a:pPr>
             <a:r>
               <a:rPr lang="ar-SA" altLang="en-US" sz="5000" dirty="0">
                 <a:solidFill>
@@ -28387,9 +28180,6 @@
               </a:rPr>
               <a:t>خَيۡرً</a:t>
             </a:r>
-            <a:pPr algn="ctr" indent="0" marL="0">
-              <a:buNone/>
-            </a:pPr>
             <a:r>
               <a:rPr lang="ar-SA" altLang="en-US" sz="3300" dirty="0">
                 <a:solidFill>
@@ -28401,9 +28191,6 @@
               </a:rPr>
               <a:t>ا</a:t>
             </a:r>
-            <a:pPr algn="ctr" indent="0" marL="0">
-              <a:buNone/>
-            </a:pPr>
             <a:r>
               <a:rPr lang="ar-SA" altLang="en-US" sz="3300" dirty="0">
                 <a:solidFill>
@@ -28415,9 +28202,6 @@
               </a:rPr>
               <a:t> </a:t>
             </a:r>
-            <a:pPr algn="ctr" indent="0" marL="0">
-              <a:buNone/>
-            </a:pPr>
             <a:r>
               <a:rPr lang="ar-SA" altLang="en-US" sz="3300" dirty="0">
                 <a:solidFill>
@@ -28429,9 +28213,6 @@
               </a:rPr>
               <a:t>ٱ</a:t>
             </a:r>
-            <a:pPr algn="ctr" indent="0" marL="0">
-              <a:buNone/>
-            </a:pPr>
             <a:r>
               <a:rPr lang="ar-SA" altLang="en-US" sz="3300" dirty="0">
                 <a:solidFill>
@@ -29259,9 +29040,6 @@
               </a:rPr>
               <a:t>ٱ</a:t>
             </a:r>
-            <a:pPr algn="ctr" indent="0" marL="0">
-              <a:buNone/>
-            </a:pPr>
             <a:r>
               <a:rPr lang="ar-SA" altLang="en-US" sz="2700" dirty="0">
                 <a:solidFill>
@@ -29273,9 +29051,6 @@
               </a:rPr>
               <a:t>لۡحَمۡدُ لِلَّهِ رَبِّ </a:t>
             </a:r>
-            <a:pPr algn="ctr" indent="0" marL="0">
-              <a:buNone/>
-            </a:pPr>
             <a:r>
               <a:rPr lang="ar-SA" altLang="en-US" sz="2700" dirty="0">
                 <a:solidFill>
@@ -29287,9 +29062,6 @@
               </a:rPr>
               <a:t>ٱ</a:t>
             </a:r>
-            <a:pPr algn="ctr" indent="0" marL="0">
-              <a:buNone/>
-            </a:pPr>
             <a:r>
               <a:rPr lang="ar-SA" altLang="en-US" sz="2700" dirty="0">
                 <a:solidFill>
@@ -29365,9 +29137,6 @@
               </a:rPr>
               <a:t>اَ</a:t>
             </a:r>
-            <a:pPr algn="ctr" indent="0" marL="0">
-              <a:buNone/>
-            </a:pPr>
             <a:r>
               <a:rPr lang="ar-SA" altLang="en-US" sz="2700" dirty="0">
                 <a:solidFill>
@@ -29379,9 +29148,6 @@
               </a:rPr>
               <a:t>لۡحَمۡدُ لِلَّهِ رَبِّ </a:t>
             </a:r>
-            <a:pPr algn="ctr" indent="0" marL="0">
-              <a:buNone/>
-            </a:pPr>
             <a:r>
               <a:rPr lang="ar-SA" altLang="en-US" sz="2700" dirty="0">
                 <a:solidFill>
@@ -29393,9 +29159,6 @@
               </a:rPr>
               <a:t>ٱ</a:t>
             </a:r>
-            <a:pPr algn="ctr" indent="0" marL="0">
-              <a:buNone/>
-            </a:pPr>
             <a:r>
               <a:rPr lang="ar-SA" altLang="en-US" sz="2700" dirty="0">
                 <a:solidFill>
@@ -30413,9 +30176,6 @@
               </a:rPr>
               <a:t>ٱ</a:t>
             </a:r>
-            <a:pPr algn="ctr" indent="0" marL="0">
-              <a:buNone/>
-            </a:pPr>
             <a:r>
               <a:rPr lang="ar-SA" altLang="en-US" sz="3900" dirty="0">
                 <a:solidFill>
@@ -30427,9 +30187,6 @@
               </a:rPr>
               <a:t>لرَّحۡمَٰنِ </a:t>
             </a:r>
-            <a:pPr algn="ctr" indent="0" marL="0">
-              <a:buNone/>
-            </a:pPr>
             <a:r>
               <a:rPr lang="ar-SA" altLang="en-US" sz="3900" dirty="0">
                 <a:solidFill>
@@ -30441,9 +30198,6 @@
               </a:rPr>
               <a:t>ٱ</a:t>
             </a:r>
-            <a:pPr algn="ctr" indent="0" marL="0">
-              <a:buNone/>
-            </a:pPr>
             <a:r>
               <a:rPr lang="ar-SA" altLang="en-US" sz="3900" dirty="0">
                 <a:solidFill>
@@ -30519,9 +30273,6 @@
               </a:rPr>
               <a:t>اَ</a:t>
             </a:r>
-            <a:pPr algn="ctr" indent="0" marL="0">
-              <a:buNone/>
-            </a:pPr>
             <a:r>
               <a:rPr lang="ar-SA" altLang="en-US" sz="3100" dirty="0">
                 <a:solidFill>
@@ -30533,9 +30284,6 @@
               </a:rPr>
               <a:t>ل</a:t>
             </a:r>
-            <a:pPr algn="ctr" indent="0" marL="0">
-              <a:buNone/>
-            </a:pPr>
             <a:r>
               <a:rPr lang="ar-SA" altLang="en-US" sz="3100" dirty="0">
                 <a:solidFill>
@@ -30547,9 +30295,6 @@
               </a:rPr>
               <a:t>رَّحۡمَٰنِ </a:t>
             </a:r>
-            <a:pPr algn="ctr" indent="0" marL="0">
-              <a:buNone/>
-            </a:pPr>
             <a:r>
               <a:rPr lang="ar-SA" altLang="en-US" sz="3100" dirty="0">
                 <a:solidFill>
@@ -30561,9 +30306,6 @@
               </a:rPr>
               <a:t>ٱل</a:t>
             </a:r>
-            <a:pPr algn="ctr" indent="0" marL="0">
-              <a:buNone/>
-            </a:pPr>
             <a:r>
               <a:rPr lang="ar-SA" altLang="en-US" sz="3100" dirty="0">
                 <a:solidFill>
@@ -31508,9 +31250,6 @@
               </a:rPr>
               <a:t>مَٰلِكِ يَوۡمِ </a:t>
             </a:r>
-            <a:pPr algn="ctr" indent="0" marL="0">
-              <a:buNone/>
-            </a:pPr>
             <a:r>
               <a:rPr lang="ar-SA" altLang="en-US" sz="4300" dirty="0">
                 <a:solidFill>
@@ -31522,9 +31261,6 @@
               </a:rPr>
               <a:t>ٱ</a:t>
             </a:r>
-            <a:pPr algn="ctr" indent="0" marL="0">
-              <a:buNone/>
-            </a:pPr>
             <a:r>
               <a:rPr lang="ar-SA" altLang="en-US" sz="4300" dirty="0">
                 <a:solidFill>
@@ -31600,9 +31336,6 @@
               </a:rPr>
               <a:t>مَٰلِكِ يَوۡمِ </a:t>
             </a:r>
-            <a:pPr algn="ctr" indent="0" marL="0">
-              <a:buNone/>
-            </a:pPr>
             <a:r>
               <a:rPr lang="ar-SA" altLang="en-US" sz="3100" dirty="0">
                 <a:solidFill>
@@ -31614,9 +31347,6 @@
               </a:rPr>
               <a:t>ٱل</a:t>
             </a:r>
-            <a:pPr algn="ctr" indent="0" marL="0">
-              <a:buNone/>
-            </a:pPr>
             <a:r>
               <a:rPr lang="ar-SA" altLang="en-US" sz="3100" dirty="0">
                 <a:solidFill>
@@ -32434,9 +32164,6 @@
               </a:rPr>
               <a:t>ٱ</a:t>
             </a:r>
-            <a:pPr algn="ctr" indent="0" marL="0">
-              <a:buNone/>
-            </a:pPr>
             <a:r>
               <a:rPr lang="ar-SA" altLang="en-US" sz="2500" dirty="0">
                 <a:solidFill>
@@ -32448,9 +32175,6 @@
               </a:rPr>
               <a:t>هۡدِنَا </a:t>
             </a:r>
-            <a:pPr algn="ctr" indent="0" marL="0">
-              <a:buNone/>
-            </a:pPr>
             <a:r>
               <a:rPr lang="ar-SA" altLang="en-US" sz="2500" dirty="0">
                 <a:solidFill>
@@ -32462,9 +32186,6 @@
               </a:rPr>
               <a:t>ٱ</a:t>
             </a:r>
-            <a:pPr algn="ctr" indent="0" marL="0">
-              <a:buNone/>
-            </a:pPr>
             <a:r>
               <a:rPr lang="ar-SA" altLang="en-US" sz="2500" dirty="0">
                 <a:solidFill>
@@ -32476,9 +32197,6 @@
               </a:rPr>
               <a:t>لصِّرَٰطَ </a:t>
             </a:r>
-            <a:pPr algn="ctr" indent="0" marL="0">
-              <a:buNone/>
-            </a:pPr>
             <a:r>
               <a:rPr lang="ar-SA" altLang="en-US" sz="2500" dirty="0">
                 <a:solidFill>
@@ -32490,9 +32208,6 @@
               </a:rPr>
               <a:t>ٱ</a:t>
             </a:r>
-            <a:pPr algn="ctr" indent="0" marL="0">
-              <a:buNone/>
-            </a:pPr>
             <a:r>
               <a:rPr lang="ar-SA" altLang="en-US" sz="2500" dirty="0">
                 <a:solidFill>
@@ -32568,9 +32283,6 @@
               </a:rPr>
               <a:t>اِ</a:t>
             </a:r>
-            <a:pPr algn="ctr" indent="0" marL="0">
-              <a:buNone/>
-            </a:pPr>
             <a:r>
               <a:rPr lang="ar-SA" altLang="en-US" sz="2400" dirty="0">
                 <a:solidFill>
@@ -32582,9 +32294,6 @@
               </a:rPr>
               <a:t>هۡدِنَ</a:t>
             </a:r>
-            <a:pPr algn="ctr" indent="0" marL="0">
-              <a:buNone/>
-            </a:pPr>
             <a:r>
               <a:rPr lang="ar-SA" altLang="en-US" sz="2400" dirty="0">
                 <a:solidFill>
@@ -32596,9 +32305,6 @@
               </a:rPr>
               <a:t>ا</a:t>
             </a:r>
-            <a:pPr algn="ctr" indent="0" marL="0">
-              <a:buNone/>
-            </a:pPr>
             <a:r>
               <a:rPr lang="ar-SA" altLang="en-US" sz="2400" dirty="0">
                 <a:solidFill>
@@ -32610,9 +32316,6 @@
               </a:rPr>
               <a:t> </a:t>
             </a:r>
-            <a:pPr algn="ctr" indent="0" marL="0">
-              <a:buNone/>
-            </a:pPr>
             <a:r>
               <a:rPr lang="ar-SA" altLang="en-US" sz="2400" dirty="0">
                 <a:solidFill>
@@ -32624,9 +32327,6 @@
               </a:rPr>
               <a:t>ٱل</a:t>
             </a:r>
-            <a:pPr algn="ctr" indent="0" marL="0">
-              <a:buNone/>
-            </a:pPr>
             <a:r>
               <a:rPr lang="ar-SA" altLang="en-US" sz="2400" dirty="0">
                 <a:solidFill>
@@ -32638,9 +32338,6 @@
               </a:rPr>
               <a:t>صِّرَٰطَ </a:t>
             </a:r>
-            <a:pPr algn="ctr" indent="0" marL="0">
-              <a:buNone/>
-            </a:pPr>
             <a:r>
               <a:rPr lang="ar-SA" altLang="en-US" sz="2400" dirty="0">
                 <a:solidFill>
@@ -32652,9 +32349,6 @@
               </a:rPr>
               <a:t>ٱ</a:t>
             </a:r>
-            <a:pPr algn="ctr" indent="0" marL="0">
-              <a:buNone/>
-            </a:pPr>
             <a:r>
               <a:rPr lang="ar-SA" altLang="en-US" sz="2400" dirty="0">
                 <a:solidFill>
@@ -34390,9 +34084,6 @@
               </a:rPr>
               <a:t>ٱ</a:t>
             </a:r>
-            <a:pPr algn="ctr" indent="0" marL="0">
-              <a:buNone/>
-            </a:pPr>
             <a:r>
               <a:rPr lang="ar-SA" altLang="en-US" sz="11100" dirty="0">
                 <a:solidFill>
@@ -35863,9 +35554,6 @@
               </a:rPr>
               <a:t>ٱ</a:t>
             </a:r>
-            <a:pPr algn="ctr" indent="0" marL="0">
-              <a:buNone/>
-            </a:pPr>
             <a:r>
               <a:rPr lang="ar-SA" altLang="en-US" sz="5300" dirty="0">
                 <a:solidFill>
@@ -35941,9 +35629,6 @@
               </a:rPr>
               <a:t>اَ</a:t>
             </a:r>
-            <a:pPr algn="ctr" indent="0" marL="0">
-              <a:buNone/>
-            </a:pPr>
             <a:r>
               <a:rPr lang="ar-SA" altLang="en-US" sz="3500" dirty="0">
                 <a:solidFill>
@@ -36771,9 +36456,6 @@
               </a:rPr>
               <a:t>ٱ</a:t>
             </a:r>
-            <a:pPr algn="ctr" indent="0" marL="0">
-              <a:buNone/>
-            </a:pPr>
             <a:r>
               <a:rPr lang="ar-SA" altLang="en-US" sz="5200" dirty="0">
                 <a:solidFill>
@@ -36849,9 +36531,6 @@
               </a:rPr>
               <a:t>اَ</a:t>
             </a:r>
-            <a:pPr algn="ctr" indent="0" marL="0">
-              <a:buNone/>
-            </a:pPr>
             <a:r>
               <a:rPr lang="ar-SA" altLang="en-US" sz="3500" dirty="0">
                 <a:solidFill>
@@ -37869,9 +37548,6 @@
               </a:rPr>
               <a:t>ٱ</a:t>
             </a:r>
-            <a:pPr algn="ctr" indent="0" marL="0">
-              <a:buNone/>
-            </a:pPr>
             <a:r>
               <a:rPr lang="ar-SA" altLang="en-US" sz="5000" dirty="0">
                 <a:solidFill>
@@ -37947,9 +37623,6 @@
               </a:rPr>
               <a:t>اِ</a:t>
             </a:r>
-            <a:pPr algn="ctr" indent="0" marL="0">
-              <a:buNone/>
-            </a:pPr>
             <a:r>
               <a:rPr lang="ar-SA" altLang="en-US" sz="3300" dirty="0">
                 <a:solidFill>
@@ -38894,9 +38567,6 @@
               </a:rPr>
               <a:t>ٱ</a:t>
             </a:r>
-            <a:pPr algn="ctr" indent="0" marL="0">
-              <a:buNone/>
-            </a:pPr>
             <a:r>
               <a:rPr lang="ar-SA" altLang="en-US" sz="5100" dirty="0">
                 <a:solidFill>
@@ -38972,9 +38642,6 @@
               </a:rPr>
               <a:t>اِ</a:t>
             </a:r>
-            <a:pPr algn="ctr" indent="0" marL="0">
-              <a:buNone/>
-            </a:pPr>
             <a:r>
               <a:rPr lang="ar-SA" altLang="en-US" sz="3400" dirty="0">
                 <a:solidFill>
